--- a/UI_Software_Delivery_and_Team_Management/Assessment3.pptx
+++ b/UI_Software_Delivery_and_Team_Management/Assessment3.pptx
@@ -140,7 +140,7 @@
       </p:grpSpPr>
       <p:sp>
         <p:nvSpPr>
-          <p:cNvPr id="1673410986" name="Header Placeholder 1"/>
+          <p:cNvPr id="1215068582" name="Header Placeholder 1"/>
           <p:cNvSpPr>
             <a:spLocks noGrp="1"/>
           </p:cNvSpPr>
@@ -174,7 +174,7 @@
       </p:sp>
       <p:sp>
         <p:nvSpPr>
-          <p:cNvPr id="698705596" name="Date Placeholder 2"/>
+          <p:cNvPr id="1809163729" name="Date Placeholder 2"/>
           <p:cNvSpPr>
             <a:spLocks noGrp="1"/>
           </p:cNvSpPr>
@@ -212,7 +212,7 @@
       </p:sp>
       <p:sp>
         <p:nvSpPr>
-          <p:cNvPr id="736795240" name="Slide Image Placeholder 3"/>
+          <p:cNvPr id="1483992437" name="Slide Image Placeholder 3"/>
           <p:cNvSpPr>
             <a:spLocks noChangeAspect="1" noGrp="1" noRot="1"/>
           </p:cNvSpPr>
@@ -248,7 +248,7 @@
       </p:sp>
       <p:sp>
         <p:nvSpPr>
-          <p:cNvPr id="113766239" name="Notes Placeholder 4"/>
+          <p:cNvPr id="486735347" name="Notes Placeholder 4"/>
           <p:cNvSpPr>
             <a:spLocks noGrp="1"/>
           </p:cNvSpPr>
@@ -322,7 +322,7 @@
       </p:sp>
       <p:sp>
         <p:nvSpPr>
-          <p:cNvPr id="913772719" name="Footer Placeholder 5"/>
+          <p:cNvPr id="2120261408" name="Footer Placeholder 5"/>
           <p:cNvSpPr>
             <a:spLocks noGrp="1"/>
           </p:cNvSpPr>
@@ -356,7 +356,7 @@
       </p:sp>
       <p:sp>
         <p:nvSpPr>
-          <p:cNvPr id="820310092" name="Slide Number Placeholder 6"/>
+          <p:cNvPr id="1625581729" name="Slide Number Placeholder 6"/>
           <p:cNvSpPr>
             <a:spLocks noGrp="1"/>
           </p:cNvSpPr>
@@ -509,7 +509,7 @@
       </p:grpSpPr>
       <p:sp>
         <p:nvSpPr>
-          <p:cNvPr id="118958767" name="Slide Image Placeholder 1"/>
+          <p:cNvPr id="405246148" name="Slide Image Placeholder 1"/>
           <p:cNvSpPr>
             <a:spLocks noChangeAspect="1" noGrp="1" noRot="1"/>
           </p:cNvSpPr>
@@ -526,7 +526,7 @@
       </p:sp>
       <p:sp>
         <p:nvSpPr>
-          <p:cNvPr id="1671974731" name="Notes Placeholder 2"/>
+          <p:cNvPr id="723613713" name="Notes Placeholder 2"/>
           <p:cNvSpPr>
             <a:spLocks noGrp="1"/>
           </p:cNvSpPr>
@@ -551,7 +551,7 @@
       </p:sp>
       <p:sp>
         <p:nvSpPr>
-          <p:cNvPr id="107558019" name="Slide Number Placeholder 3"/>
+          <p:cNvPr id="808904291" name="Slide Number Placeholder 3"/>
           <p:cNvSpPr>
             <a:spLocks noGrp="1"/>
           </p:cNvSpPr>
@@ -602,7 +602,7 @@
       </p:grpSpPr>
       <p:sp>
         <p:nvSpPr>
-          <p:cNvPr id="2" name="Slide Image Placeholder 1"/>
+          <p:cNvPr id="767045871" name="Slide Image Placeholder 1"/>
           <p:cNvSpPr>
             <a:spLocks noChangeAspect="1" noGrp="1" noRot="1"/>
           </p:cNvSpPr>
@@ -614,7 +614,7 @@
       </p:sp>
       <p:sp>
         <p:nvSpPr>
-          <p:cNvPr id="3" name="Notes Placeholder 2"/>
+          <p:cNvPr id="45746303" name="Notes Placeholder 2"/>
           <p:cNvSpPr>
             <a:spLocks noGrp="1"/>
           </p:cNvSpPr>
@@ -636,7 +636,7 @@
       </p:sp>
       <p:sp>
         <p:nvSpPr>
-          <p:cNvPr id="4" name="Slide Number Placeholder 3"/>
+          <p:cNvPr id="190168039" name="Slide Number Placeholder 3"/>
           <p:cNvSpPr>
             <a:spLocks noGrp="1"/>
           </p:cNvSpPr>
@@ -687,7 +687,7 @@
       </p:grpSpPr>
       <p:sp>
         <p:nvSpPr>
-          <p:cNvPr id="1831116011" name="Slide Image Placeholder 1"/>
+          <p:cNvPr id="1064257902" name="Slide Image Placeholder 1"/>
           <p:cNvSpPr>
             <a:spLocks noChangeAspect="1" noGrp="1" noRot="1"/>
           </p:cNvSpPr>
@@ -699,7 +699,7 @@
       </p:sp>
       <p:sp>
         <p:nvSpPr>
-          <p:cNvPr id="934065895" name="Notes Placeholder 2"/>
+          <p:cNvPr id="1190262170" name="Notes Placeholder 2"/>
           <p:cNvSpPr>
             <a:spLocks noGrp="1"/>
           </p:cNvSpPr>
@@ -721,7 +721,7 @@
       </p:sp>
       <p:sp>
         <p:nvSpPr>
-          <p:cNvPr id="779179428" name="Slide Number Placeholder 3"/>
+          <p:cNvPr id="1139129022" name="Slide Number Placeholder 3"/>
           <p:cNvSpPr>
             <a:spLocks noGrp="1"/>
           </p:cNvSpPr>
@@ -772,7 +772,7 @@
       </p:grpSpPr>
       <p:sp>
         <p:nvSpPr>
-          <p:cNvPr id="1131075728" name="Slide Image Placeholder 1"/>
+          <p:cNvPr id="1814074736" name="Slide Image Placeholder 1"/>
           <p:cNvSpPr>
             <a:spLocks noChangeAspect="1" noGrp="1" noRot="1"/>
           </p:cNvSpPr>
@@ -784,7 +784,7 @@
       </p:sp>
       <p:sp>
         <p:nvSpPr>
-          <p:cNvPr id="2124258868" name="Notes Placeholder 2"/>
+          <p:cNvPr id="461805525" name="Notes Placeholder 2"/>
           <p:cNvSpPr>
             <a:spLocks noGrp="1"/>
           </p:cNvSpPr>
@@ -806,7 +806,7 @@
       </p:sp>
       <p:sp>
         <p:nvSpPr>
-          <p:cNvPr id="92938275" name="Slide Number Placeholder 3"/>
+          <p:cNvPr id="335504305" name="Slide Number Placeholder 3"/>
           <p:cNvSpPr>
             <a:spLocks noGrp="1"/>
           </p:cNvSpPr>
@@ -857,7 +857,7 @@
       </p:grpSpPr>
       <p:sp>
         <p:nvSpPr>
-          <p:cNvPr id="2" name="Slide Image Placeholder 1"/>
+          <p:cNvPr id="1456226162" name="Slide Image Placeholder 1"/>
           <p:cNvSpPr>
             <a:spLocks noChangeAspect="1" noGrp="1" noRot="1"/>
           </p:cNvSpPr>
@@ -869,7 +869,7 @@
       </p:sp>
       <p:sp>
         <p:nvSpPr>
-          <p:cNvPr id="3" name="Notes Placeholder 2"/>
+          <p:cNvPr id="227208366" name="Notes Placeholder 2"/>
           <p:cNvSpPr>
             <a:spLocks noGrp="1"/>
           </p:cNvSpPr>
@@ -891,7 +891,7 @@
       </p:sp>
       <p:sp>
         <p:nvSpPr>
-          <p:cNvPr id="4" name="Slide Number Placeholder 3"/>
+          <p:cNvPr id="2117262847" name="Slide Number Placeholder 3"/>
           <p:cNvSpPr>
             <a:spLocks noGrp="1"/>
           </p:cNvSpPr>
@@ -942,7 +942,7 @@
       </p:grpSpPr>
       <p:sp>
         <p:nvSpPr>
-          <p:cNvPr id="2121352240" name="Slide Image Placeholder 1"/>
+          <p:cNvPr id="2113005756" name="Slide Image Placeholder 1"/>
           <p:cNvSpPr>
             <a:spLocks noChangeAspect="1" noGrp="1" noRot="1"/>
           </p:cNvSpPr>
@@ -954,7 +954,7 @@
       </p:sp>
       <p:sp>
         <p:nvSpPr>
-          <p:cNvPr id="1115749766" name="Notes Placeholder 2"/>
+          <p:cNvPr id="1714583930" name="Notes Placeholder 2"/>
           <p:cNvSpPr>
             <a:spLocks noGrp="1"/>
           </p:cNvSpPr>
@@ -976,7 +976,7 @@
       </p:sp>
       <p:sp>
         <p:nvSpPr>
-          <p:cNvPr id="802618007" name="Slide Number Placeholder 3"/>
+          <p:cNvPr id="75068374" name="Slide Number Placeholder 3"/>
           <p:cNvSpPr>
             <a:spLocks noGrp="1"/>
           </p:cNvSpPr>
@@ -1027,7 +1027,7 @@
       </p:grpSpPr>
       <p:sp>
         <p:nvSpPr>
-          <p:cNvPr id="479757011" name="Slide Image Placeholder 1"/>
+          <p:cNvPr id="1427293253" name="Slide Image Placeholder 1"/>
           <p:cNvSpPr>
             <a:spLocks noChangeAspect="1" noGrp="1" noRot="1"/>
           </p:cNvSpPr>
@@ -1039,7 +1039,7 @@
       </p:sp>
       <p:sp>
         <p:nvSpPr>
-          <p:cNvPr id="487764712" name="Notes Placeholder 2"/>
+          <p:cNvPr id="654923894" name="Notes Placeholder 2"/>
           <p:cNvSpPr>
             <a:spLocks noGrp="1"/>
           </p:cNvSpPr>
@@ -1061,7 +1061,7 @@
       </p:sp>
       <p:sp>
         <p:nvSpPr>
-          <p:cNvPr id="622825285" name="Slide Number Placeholder 3"/>
+          <p:cNvPr id="2103128119" name="Slide Number Placeholder 3"/>
           <p:cNvSpPr>
             <a:spLocks noGrp="1"/>
           </p:cNvSpPr>
@@ -1122,7 +1122,7 @@
       </p:grpSpPr>
       <p:sp>
         <p:nvSpPr>
-          <p:cNvPr id="357057716" name="Rectangle 6"/>
+          <p:cNvPr id="498163009" name="Rectangle 6"/>
           <p:cNvSpPr/>
           <p:nvPr userDrawn="1"/>
         </p:nvSpPr>
@@ -1146,7 +1146,7 @@
       </p:sp>
       <p:sp>
         <p:nvSpPr>
-          <p:cNvPr id="1184996574" name="Rectangle 16"/>
+          <p:cNvPr id="433108930" name="Rectangle 16"/>
           <p:cNvSpPr/>
           <p:nvPr userDrawn="1"/>
         </p:nvSpPr>
@@ -1170,7 +1170,7 @@
       </p:sp>
       <p:sp>
         <p:nvSpPr>
-          <p:cNvPr id="283290071" name="Rectangle 18"/>
+          <p:cNvPr id="146263426" name="Rectangle 18"/>
           <p:cNvSpPr/>
           <p:nvPr userDrawn="1"/>
         </p:nvSpPr>
@@ -1194,7 +1194,7 @@
       </p:sp>
       <p:sp>
         <p:nvSpPr>
-          <p:cNvPr id="1666835708" name="Rectangle 19"/>
+          <p:cNvPr id="843526798" name="Rectangle 19"/>
           <p:cNvSpPr/>
           <p:nvPr userDrawn="1"/>
         </p:nvSpPr>
@@ -1218,7 +1218,7 @@
       </p:sp>
       <p:sp>
         <p:nvSpPr>
-          <p:cNvPr id="280831625" name="Rectangle 21"/>
+          <p:cNvPr id="1869624543" name="Rectangle 21"/>
           <p:cNvSpPr/>
           <p:nvPr userDrawn="1"/>
         </p:nvSpPr>
@@ -1242,7 +1242,7 @@
       </p:sp>
       <p:sp>
         <p:nvSpPr>
-          <p:cNvPr id="1063259684" name="Rectangle 22"/>
+          <p:cNvPr id="1756187558" name="Rectangle 22"/>
           <p:cNvSpPr/>
           <p:nvPr userDrawn="1"/>
         </p:nvSpPr>
@@ -1266,7 +1266,7 @@
       </p:sp>
       <p:sp>
         <p:nvSpPr>
-          <p:cNvPr id="1848547261" name="Rectangle 24"/>
+          <p:cNvPr id="227337156" name="Rectangle 24"/>
           <p:cNvSpPr/>
           <p:nvPr userDrawn="1"/>
         </p:nvSpPr>
@@ -1290,7 +1290,7 @@
       </p:sp>
       <p:sp>
         <p:nvSpPr>
-          <p:cNvPr id="518429784" name="Rectangle 26"/>
+          <p:cNvPr id="1290464851" name="Rectangle 26"/>
           <p:cNvSpPr/>
           <p:nvPr userDrawn="1"/>
         </p:nvSpPr>
@@ -1314,7 +1314,7 @@
       </p:sp>
       <p:sp>
         <p:nvSpPr>
-          <p:cNvPr id="761157414" name="Rectangle 27"/>
+          <p:cNvPr id="57089950" name="Rectangle 27"/>
           <p:cNvSpPr/>
           <p:nvPr userDrawn="1"/>
         </p:nvSpPr>
@@ -1338,7 +1338,7 @@
       </p:sp>
       <p:sp>
         <p:nvSpPr>
-          <p:cNvPr id="1982857487" name="Rectangle 28"/>
+          <p:cNvPr id="489389950" name="Rectangle 28"/>
           <p:cNvSpPr/>
           <p:nvPr userDrawn="1"/>
         </p:nvSpPr>
@@ -1362,7 +1362,7 @@
       </p:sp>
       <p:sp>
         <p:nvSpPr>
-          <p:cNvPr id="706525519" name="Rectangle 25"/>
+          <p:cNvPr id="557834430" name="Rectangle 25"/>
           <p:cNvSpPr/>
           <p:nvPr userDrawn="1"/>
         </p:nvSpPr>
@@ -1386,7 +1386,7 @@
       </p:sp>
       <p:sp>
         <p:nvSpPr>
-          <p:cNvPr id="1172031912" name="Rectangle 20"/>
+          <p:cNvPr id="965474400" name="Rectangle 20"/>
           <p:cNvSpPr/>
           <p:nvPr userDrawn="1"/>
         </p:nvSpPr>
@@ -1410,7 +1410,7 @@
       </p:sp>
       <p:sp>
         <p:nvSpPr>
-          <p:cNvPr id="1897618469" name="Rectangle 43"/>
+          <p:cNvPr id="819130851" name="Rectangle 43"/>
           <p:cNvSpPr/>
           <p:nvPr userDrawn="1"/>
         </p:nvSpPr>
@@ -1434,7 +1434,7 @@
       </p:sp>
       <p:sp>
         <p:nvSpPr>
-          <p:cNvPr id="1702566343" name="Rectangle 45"/>
+          <p:cNvPr id="1430667915" name="Rectangle 45"/>
           <p:cNvSpPr/>
           <p:nvPr userDrawn="1"/>
         </p:nvSpPr>
@@ -1458,7 +1458,7 @@
       </p:sp>
       <p:sp>
         <p:nvSpPr>
-          <p:cNvPr id="1804927013" name="Rectangle 44"/>
+          <p:cNvPr id="1302459031" name="Rectangle 44"/>
           <p:cNvSpPr/>
           <p:nvPr userDrawn="1"/>
         </p:nvSpPr>
@@ -1488,7 +1488,7 @@
       </p:sp>
       <p:sp>
         <p:nvSpPr>
-          <p:cNvPr id="476926056" name="Subtitle 2"/>
+          <p:cNvPr id="1882435006" name="Subtitle 2"/>
           <p:cNvSpPr>
             <a:spLocks noGrp="1"/>
           </p:cNvSpPr>
@@ -1612,7 +1612,7 @@
       </p:sp>
       <p:sp>
         <p:nvSpPr>
-          <p:cNvPr id="1576214952" name="Title 9"/>
+          <p:cNvPr id="1846764203" name="Title 9"/>
           <p:cNvSpPr>
             <a:spLocks noGrp="1"/>
           </p:cNvSpPr>
@@ -1655,7 +1655,7 @@
       </p:sp>
       <p:cxnSp>
         <p:nvCxnSpPr>
-          <p:cNvPr id="1093546447" name="Прямая соединительная линия 48"/>
+          <p:cNvPr id="1385603386" name="Прямая соединительная линия 48"/>
           <p:cNvCxnSpPr/>
           <p:nvPr userDrawn="1"/>
         </p:nvCxnSpPr>
@@ -1692,13 +1692,13 @@
       </p:cxnSp>
       <p:sp>
         <p:nvSpPr>
-          <p:cNvPr id="292323342" name="Овал 50"/>
+          <p:cNvPr id="744295884" name="Овал 50"/>
           <p:cNvSpPr/>
           <p:nvPr userDrawn="1"/>
         </p:nvSpPr>
         <p:spPr bwMode="auto">
           <a:xfrm>
-            <a:off x="6172819" y="3896087"/>
+            <a:off x="6172818" y="3896087"/>
             <a:ext cx="96010" cy="72009"/>
           </a:xfrm>
           <a:prstGeom prst="ellipse">
@@ -1715,7 +1715,7 @@
       </p:sp>
       <p:cxnSp>
         <p:nvCxnSpPr>
-          <p:cNvPr id="1645691498" name="Прямая соединительная линия 53"/>
+          <p:cNvPr id="1633377926" name="Прямая соединительная линия 53"/>
           <p:cNvCxnSpPr/>
           <p:nvPr userDrawn="1"/>
         </p:nvCxnSpPr>
@@ -1752,7 +1752,7 @@
       </p:cxnSp>
       <p:sp>
         <p:nvSpPr>
-          <p:cNvPr id="493737062" name="Date Placeholder 3"/>
+          <p:cNvPr id="265857700" name="Date Placeholder 3"/>
           <p:cNvSpPr>
             <a:spLocks noGrp="1"/>
           </p:cNvSpPr>
@@ -1778,7 +1778,7 @@
       </p:sp>
       <p:sp>
         <p:nvSpPr>
-          <p:cNvPr id="556845099" name="Footer Placeholder 4"/>
+          <p:cNvPr id="915690661" name="Footer Placeholder 4"/>
           <p:cNvSpPr>
             <a:spLocks noGrp="1"/>
           </p:cNvSpPr>
@@ -1800,7 +1800,7 @@
       </p:sp>
       <p:sp>
         <p:nvSpPr>
-          <p:cNvPr id="235600033" name="Slide Number Placeholder 5"/>
+          <p:cNvPr id="1024164414" name="Slide Number Placeholder 5"/>
           <p:cNvSpPr>
             <a:spLocks noGrp="1"/>
           </p:cNvSpPr>
@@ -1851,7 +1851,7 @@
       </p:grpSpPr>
       <p:sp>
         <p:nvSpPr>
-          <p:cNvPr id="2078716978" name="Title 1"/>
+          <p:cNvPr id="437985903" name="Title 1"/>
           <p:cNvSpPr>
             <a:spLocks noGrp="1"/>
           </p:cNvSpPr>
@@ -1877,7 +1877,7 @@
       </p:sp>
       <p:sp>
         <p:nvSpPr>
-          <p:cNvPr id="2013008099" name="Vertical Text Placeholder 2"/>
+          <p:cNvPr id="1774502964" name="Vertical Text Placeholder 2"/>
           <p:cNvSpPr>
             <a:spLocks noGrp="1"/>
           </p:cNvSpPr>
@@ -1943,7 +1943,7 @@
       </p:sp>
       <p:sp>
         <p:nvSpPr>
-          <p:cNvPr id="446303182" name="Date Placeholder 3"/>
+          <p:cNvPr id="1068621146" name="Date Placeholder 3"/>
           <p:cNvSpPr>
             <a:spLocks noGrp="1"/>
           </p:cNvSpPr>
@@ -1969,7 +1969,7 @@
       </p:sp>
       <p:sp>
         <p:nvSpPr>
-          <p:cNvPr id="193468590" name="Footer Placeholder 4"/>
+          <p:cNvPr id="564912412" name="Footer Placeholder 4"/>
           <p:cNvSpPr>
             <a:spLocks noGrp="1"/>
           </p:cNvSpPr>
@@ -1991,7 +1991,7 @@
       </p:sp>
       <p:sp>
         <p:nvSpPr>
-          <p:cNvPr id="560198134" name="Slide Number Placeholder 5"/>
+          <p:cNvPr id="1749525005" name="Slide Number Placeholder 5"/>
           <p:cNvSpPr>
             <a:spLocks noGrp="1"/>
           </p:cNvSpPr>
@@ -2042,7 +2042,7 @@
       </p:grpSpPr>
       <p:sp>
         <p:nvSpPr>
-          <p:cNvPr id="2104467423" name="Vertical Title 1"/>
+          <p:cNvPr id="1854268065" name="Vertical Title 1"/>
           <p:cNvSpPr>
             <a:spLocks noGrp="1"/>
           </p:cNvSpPr>
@@ -2073,7 +2073,7 @@
       </p:sp>
       <p:sp>
         <p:nvSpPr>
-          <p:cNvPr id="813853774" name="Vertical Text Placeholder 2"/>
+          <p:cNvPr id="1058061875" name="Vertical Text Placeholder 2"/>
           <p:cNvSpPr>
             <a:spLocks noGrp="1"/>
           </p:cNvSpPr>
@@ -2144,7 +2144,7 @@
       </p:sp>
       <p:sp>
         <p:nvSpPr>
-          <p:cNvPr id="517203418" name="Date Placeholder 3"/>
+          <p:cNvPr id="2062548391" name="Date Placeholder 3"/>
           <p:cNvSpPr>
             <a:spLocks noGrp="1"/>
           </p:cNvSpPr>
@@ -2170,7 +2170,7 @@
       </p:sp>
       <p:sp>
         <p:nvSpPr>
-          <p:cNvPr id="1370680888" name="Footer Placeholder 4"/>
+          <p:cNvPr id="322250416" name="Footer Placeholder 4"/>
           <p:cNvSpPr>
             <a:spLocks noGrp="1"/>
           </p:cNvSpPr>
@@ -2192,7 +2192,7 @@
       </p:sp>
       <p:sp>
         <p:nvSpPr>
-          <p:cNvPr id="544418475" name="Slide Number Placeholder 5"/>
+          <p:cNvPr id="1685267461" name="Slide Number Placeholder 5"/>
           <p:cNvSpPr>
             <a:spLocks noGrp="1"/>
           </p:cNvSpPr>
@@ -2243,7 +2243,7 @@
       </p:grpSpPr>
       <p:sp>
         <p:nvSpPr>
-          <p:cNvPr id="1693535065" name="Title 1"/>
+          <p:cNvPr id="1807957505" name="Title 1"/>
           <p:cNvSpPr>
             <a:spLocks noGrp="1"/>
           </p:cNvSpPr>
@@ -2269,7 +2269,7 @@
       </p:sp>
       <p:sp>
         <p:nvSpPr>
-          <p:cNvPr id="999494056" name="Content Placeholder 2"/>
+          <p:cNvPr id="853607289" name="Content Placeholder 2"/>
           <p:cNvSpPr>
             <a:spLocks noGrp="1"/>
           </p:cNvSpPr>
@@ -2335,7 +2335,7 @@
       </p:sp>
       <p:sp>
         <p:nvSpPr>
-          <p:cNvPr id="1889839189" name="Date Placeholder 3"/>
+          <p:cNvPr id="117172539" name="Date Placeholder 3"/>
           <p:cNvSpPr>
             <a:spLocks noGrp="1"/>
           </p:cNvSpPr>
@@ -2361,7 +2361,7 @@
       </p:sp>
       <p:sp>
         <p:nvSpPr>
-          <p:cNvPr id="1955270864" name="Footer Placeholder 4"/>
+          <p:cNvPr id="756593321" name="Footer Placeholder 4"/>
           <p:cNvSpPr>
             <a:spLocks noGrp="1"/>
           </p:cNvSpPr>
@@ -2383,7 +2383,7 @@
       </p:sp>
       <p:sp>
         <p:nvSpPr>
-          <p:cNvPr id="544558463" name="Slide Number Placeholder 5"/>
+          <p:cNvPr id="2015212277" name="Slide Number Placeholder 5"/>
           <p:cNvSpPr>
             <a:spLocks noGrp="1"/>
           </p:cNvSpPr>
@@ -2434,7 +2434,7 @@
       </p:grpSpPr>
       <p:sp>
         <p:nvSpPr>
-          <p:cNvPr id="583786973" name="Text Placeholder 2"/>
+          <p:cNvPr id="301713529" name="Text Placeholder 2"/>
           <p:cNvSpPr>
             <a:spLocks noGrp="1"/>
           </p:cNvSpPr>
@@ -2556,7 +2556,7 @@
       </p:sp>
       <p:sp>
         <p:nvSpPr>
-          <p:cNvPr id="796986425" name="Date Placeholder 3"/>
+          <p:cNvPr id="1213919170" name="Date Placeholder 3"/>
           <p:cNvSpPr>
             <a:spLocks noGrp="1"/>
           </p:cNvSpPr>
@@ -2582,7 +2582,7 @@
       </p:sp>
       <p:sp>
         <p:nvSpPr>
-          <p:cNvPr id="1509074209" name="Footer Placeholder 4"/>
+          <p:cNvPr id="2071953365" name="Footer Placeholder 4"/>
           <p:cNvSpPr>
             <a:spLocks noGrp="1"/>
           </p:cNvSpPr>
@@ -2604,7 +2604,7 @@
       </p:sp>
       <p:sp>
         <p:nvSpPr>
-          <p:cNvPr id="599339976" name="Slide Number Placeholder 5"/>
+          <p:cNvPr id="1802491772" name="Slide Number Placeholder 5"/>
           <p:cNvSpPr>
             <a:spLocks noGrp="1"/>
           </p:cNvSpPr>
@@ -2630,7 +2630,7 @@
       </p:sp>
       <p:sp>
         <p:nvSpPr>
-          <p:cNvPr id="1597131526" name="Title 1"/>
+          <p:cNvPr id="1252552106" name="Title 1"/>
           <p:cNvSpPr>
             <a:spLocks noGrp="1"/>
           </p:cNvSpPr>
@@ -2686,7 +2686,7 @@
       </p:grpSpPr>
       <p:sp>
         <p:nvSpPr>
-          <p:cNvPr id="1130281164" name="Title 1"/>
+          <p:cNvPr id="1642640846" name="Title 1"/>
           <p:cNvSpPr>
             <a:spLocks noGrp="1"/>
           </p:cNvSpPr>
@@ -2712,7 +2712,7 @@
       </p:sp>
       <p:sp>
         <p:nvSpPr>
-          <p:cNvPr id="1908367049" name="Content Placeholder 2"/>
+          <p:cNvPr id="1605080369" name="Content Placeholder 2"/>
           <p:cNvSpPr>
             <a:spLocks noGrp="1"/>
           </p:cNvSpPr>
@@ -2815,7 +2815,7 @@
       </p:sp>
       <p:sp>
         <p:nvSpPr>
-          <p:cNvPr id="1373123442" name="Content Placeholder 3"/>
+          <p:cNvPr id="1753906061" name="Content Placeholder 3"/>
           <p:cNvSpPr>
             <a:spLocks noGrp="1"/>
           </p:cNvSpPr>
@@ -2918,7 +2918,7 @@
       </p:sp>
       <p:sp>
         <p:nvSpPr>
-          <p:cNvPr id="1296269001" name="Date Placeholder 4"/>
+          <p:cNvPr id="1500416580" name="Date Placeholder 4"/>
           <p:cNvSpPr>
             <a:spLocks noGrp="1"/>
           </p:cNvSpPr>
@@ -2944,7 +2944,7 @@
       </p:sp>
       <p:sp>
         <p:nvSpPr>
-          <p:cNvPr id="1363694139" name="Footer Placeholder 5"/>
+          <p:cNvPr id="590871330" name="Footer Placeholder 5"/>
           <p:cNvSpPr>
             <a:spLocks noGrp="1"/>
           </p:cNvSpPr>
@@ -2966,7 +2966,7 @@
       </p:sp>
       <p:sp>
         <p:nvSpPr>
-          <p:cNvPr id="1208546011" name="Slide Number Placeholder 6"/>
+          <p:cNvPr id="278635240" name="Slide Number Placeholder 6"/>
           <p:cNvSpPr>
             <a:spLocks noGrp="1"/>
           </p:cNvSpPr>
@@ -3017,7 +3017,7 @@
       </p:grpSpPr>
       <p:sp>
         <p:nvSpPr>
-          <p:cNvPr id="1417401597" name="Title 1"/>
+          <p:cNvPr id="1780827893" name="Title 1"/>
           <p:cNvSpPr>
             <a:spLocks noGrp="1"/>
           </p:cNvSpPr>
@@ -3047,7 +3047,7 @@
       </p:sp>
       <p:sp>
         <p:nvSpPr>
-          <p:cNvPr id="275784461" name="Text Placeholder 2"/>
+          <p:cNvPr id="130019378" name="Text Placeholder 2"/>
           <p:cNvSpPr>
             <a:spLocks noGrp="1"/>
           </p:cNvSpPr>
@@ -3119,7 +3119,7 @@
       </p:sp>
       <p:sp>
         <p:nvSpPr>
-          <p:cNvPr id="1619690414" name="Content Placeholder 3"/>
+          <p:cNvPr id="945466190" name="Content Placeholder 3"/>
           <p:cNvSpPr>
             <a:spLocks noGrp="1"/>
           </p:cNvSpPr>
@@ -3222,7 +3222,7 @@
       </p:sp>
       <p:sp>
         <p:nvSpPr>
-          <p:cNvPr id="879763543" name="Text Placeholder 4"/>
+          <p:cNvPr id="767375343" name="Text Placeholder 4"/>
           <p:cNvSpPr>
             <a:spLocks noGrp="1"/>
           </p:cNvSpPr>
@@ -3294,7 +3294,7 @@
       </p:sp>
       <p:sp>
         <p:nvSpPr>
-          <p:cNvPr id="2022628570" name="Content Placeholder 5"/>
+          <p:cNvPr id="1770365278" name="Content Placeholder 5"/>
           <p:cNvSpPr>
             <a:spLocks noGrp="1"/>
           </p:cNvSpPr>
@@ -3397,7 +3397,7 @@
       </p:sp>
       <p:sp>
         <p:nvSpPr>
-          <p:cNvPr id="1595921421" name="Date Placeholder 6"/>
+          <p:cNvPr id="245395078" name="Date Placeholder 6"/>
           <p:cNvSpPr>
             <a:spLocks noGrp="1"/>
           </p:cNvSpPr>
@@ -3423,7 +3423,7 @@
       </p:sp>
       <p:sp>
         <p:nvSpPr>
-          <p:cNvPr id="2145414014" name="Footer Placeholder 7"/>
+          <p:cNvPr id="1114712430" name="Footer Placeholder 7"/>
           <p:cNvSpPr>
             <a:spLocks noGrp="1"/>
           </p:cNvSpPr>
@@ -3445,7 +3445,7 @@
       </p:sp>
       <p:sp>
         <p:nvSpPr>
-          <p:cNvPr id="623422107" name="Slide Number Placeholder 8"/>
+          <p:cNvPr id="307519801" name="Slide Number Placeholder 8"/>
           <p:cNvSpPr>
             <a:spLocks noGrp="1"/>
           </p:cNvSpPr>
@@ -3496,7 +3496,7 @@
       </p:grpSpPr>
       <p:sp>
         <p:nvSpPr>
-          <p:cNvPr id="533063213" name="Title 1"/>
+          <p:cNvPr id="495637754" name="Title 1"/>
           <p:cNvSpPr>
             <a:spLocks noGrp="1"/>
           </p:cNvSpPr>
@@ -3522,7 +3522,7 @@
       </p:sp>
       <p:sp>
         <p:nvSpPr>
-          <p:cNvPr id="2034279053" name="Date Placeholder 2"/>
+          <p:cNvPr id="1808148934" name="Date Placeholder 2"/>
           <p:cNvSpPr>
             <a:spLocks noGrp="1"/>
           </p:cNvSpPr>
@@ -3548,7 +3548,7 @@
       </p:sp>
       <p:sp>
         <p:nvSpPr>
-          <p:cNvPr id="218619502" name="Footer Placeholder 3"/>
+          <p:cNvPr id="1024257099" name="Footer Placeholder 3"/>
           <p:cNvSpPr>
             <a:spLocks noGrp="1"/>
           </p:cNvSpPr>
@@ -3570,7 +3570,7 @@
       </p:sp>
       <p:sp>
         <p:nvSpPr>
-          <p:cNvPr id="1928011788" name="Slide Number Placeholder 4"/>
+          <p:cNvPr id="168661276" name="Slide Number Placeholder 4"/>
           <p:cNvSpPr>
             <a:spLocks noGrp="1"/>
           </p:cNvSpPr>
@@ -3621,7 +3621,7 @@
       </p:grpSpPr>
       <p:sp>
         <p:nvSpPr>
-          <p:cNvPr id="97274463" name="Date Placeholder 1"/>
+          <p:cNvPr id="784238809" name="Date Placeholder 1"/>
           <p:cNvSpPr>
             <a:spLocks noGrp="1"/>
           </p:cNvSpPr>
@@ -3647,7 +3647,7 @@
       </p:sp>
       <p:sp>
         <p:nvSpPr>
-          <p:cNvPr id="1343603538" name="Footer Placeholder 2"/>
+          <p:cNvPr id="62672651" name="Footer Placeholder 2"/>
           <p:cNvSpPr>
             <a:spLocks noGrp="1"/>
           </p:cNvSpPr>
@@ -3669,7 +3669,7 @@
       </p:sp>
       <p:sp>
         <p:nvSpPr>
-          <p:cNvPr id="1622471010" name="Slide Number Placeholder 3"/>
+          <p:cNvPr id="1556335969" name="Slide Number Placeholder 3"/>
           <p:cNvSpPr>
             <a:spLocks noGrp="1"/>
           </p:cNvSpPr>
@@ -3720,7 +3720,7 @@
       </p:grpSpPr>
       <p:sp>
         <p:nvSpPr>
-          <p:cNvPr id="1723609054" name="Content Placeholder 2"/>
+          <p:cNvPr id="992586636" name="Content Placeholder 2"/>
           <p:cNvSpPr>
             <a:spLocks noGrp="1"/>
           </p:cNvSpPr>
@@ -3825,7 +3825,7 @@
       </p:sp>
       <p:sp>
         <p:nvSpPr>
-          <p:cNvPr id="2022533638" name="Text Placeholder 3"/>
+          <p:cNvPr id="1919454339" name="Text Placeholder 3"/>
           <p:cNvSpPr>
             <a:spLocks noGrp="1"/>
           </p:cNvSpPr>
@@ -3836,7 +3836,7 @@
         <p:spPr bwMode="auto">
           <a:xfrm>
             <a:off x="609601" y="1196751"/>
-            <a:ext cx="4011084" cy="4929411"/>
+            <a:ext cx="4011084" cy="4929410"/>
           </a:xfrm>
           <a:prstGeom prst="rect">
             <a:avLst/>
@@ -3899,7 +3899,7 @@
       </p:sp>
       <p:sp>
         <p:nvSpPr>
-          <p:cNvPr id="2100182310" name="Date Placeholder 4"/>
+          <p:cNvPr id="1781959529" name="Date Placeholder 4"/>
           <p:cNvSpPr>
             <a:spLocks noGrp="1"/>
           </p:cNvSpPr>
@@ -3925,7 +3925,7 @@
       </p:sp>
       <p:sp>
         <p:nvSpPr>
-          <p:cNvPr id="893451426" name="Footer Placeholder 5"/>
+          <p:cNvPr id="1083373524" name="Footer Placeholder 5"/>
           <p:cNvSpPr>
             <a:spLocks noGrp="1"/>
           </p:cNvSpPr>
@@ -3947,7 +3947,7 @@
       </p:sp>
       <p:sp>
         <p:nvSpPr>
-          <p:cNvPr id="1332412790" name="Slide Number Placeholder 6"/>
+          <p:cNvPr id="887911160" name="Slide Number Placeholder 6"/>
           <p:cNvSpPr>
             <a:spLocks noGrp="1"/>
           </p:cNvSpPr>
@@ -3973,7 +3973,7 @@
       </p:sp>
       <p:sp>
         <p:nvSpPr>
-          <p:cNvPr id="739744847" name="Title 1"/>
+          <p:cNvPr id="1347006487" name="Title 1"/>
           <p:cNvSpPr>
             <a:spLocks noGrp="1"/>
           </p:cNvSpPr>
@@ -4029,7 +4029,7 @@
       </p:grpSpPr>
       <p:sp>
         <p:nvSpPr>
-          <p:cNvPr id="340588772" name="Picture Placeholder 2"/>
+          <p:cNvPr id="2023337563" name="Picture Placeholder 2"/>
           <p:cNvSpPr>
             <a:spLocks noGrp="1"/>
           </p:cNvSpPr>
@@ -4097,7 +4097,7 @@
       </p:sp>
       <p:sp>
         <p:nvSpPr>
-          <p:cNvPr id="1266741773" name="Text Placeholder 3"/>
+          <p:cNvPr id="1481287112" name="Text Placeholder 3"/>
           <p:cNvSpPr>
             <a:spLocks noGrp="1"/>
           </p:cNvSpPr>
@@ -4165,7 +4165,7 @@
       </p:sp>
       <p:sp>
         <p:nvSpPr>
-          <p:cNvPr id="851038670" name="Date Placeholder 4"/>
+          <p:cNvPr id="2079829269" name="Date Placeholder 4"/>
           <p:cNvSpPr>
             <a:spLocks noGrp="1"/>
           </p:cNvSpPr>
@@ -4191,7 +4191,7 @@
       </p:sp>
       <p:sp>
         <p:nvSpPr>
-          <p:cNvPr id="1132837700" name="Footer Placeholder 5"/>
+          <p:cNvPr id="1330140696" name="Footer Placeholder 5"/>
           <p:cNvSpPr>
             <a:spLocks noGrp="1"/>
           </p:cNvSpPr>
@@ -4213,7 +4213,7 @@
       </p:sp>
       <p:sp>
         <p:nvSpPr>
-          <p:cNvPr id="845052372" name="Slide Number Placeholder 6"/>
+          <p:cNvPr id="519253683" name="Slide Number Placeholder 6"/>
           <p:cNvSpPr>
             <a:spLocks noGrp="1"/>
           </p:cNvSpPr>
@@ -4239,7 +4239,7 @@
       </p:sp>
       <p:sp>
         <p:nvSpPr>
-          <p:cNvPr id="891632371" name="Title 1"/>
+          <p:cNvPr id="107049536" name="Title 1"/>
           <p:cNvSpPr>
             <a:spLocks noGrp="1"/>
           </p:cNvSpPr>
@@ -4305,7 +4305,7 @@
       </p:grpSpPr>
       <p:sp>
         <p:nvSpPr>
-          <p:cNvPr id="1498820135" name="Title Placeholder 1"/>
+          <p:cNvPr id="2074628782" name="Title Placeholder 1"/>
           <p:cNvSpPr>
             <a:spLocks noGrp="1"/>
           </p:cNvSpPr>
@@ -4337,7 +4337,7 @@
       </p:sp>
       <p:sp>
         <p:nvSpPr>
-          <p:cNvPr id="688724350" name="Text Placeholder 2"/>
+          <p:cNvPr id="833391294" name="Text Placeholder 2"/>
           <p:cNvSpPr>
             <a:spLocks noGrp="1"/>
           </p:cNvSpPr>
@@ -4418,7 +4418,7 @@
       </p:sp>
       <p:sp>
         <p:nvSpPr>
-          <p:cNvPr id="1207009190" name="Date Placeholder 3"/>
+          <p:cNvPr id="1898849951" name="Date Placeholder 3"/>
           <p:cNvSpPr>
             <a:spLocks noGrp="1"/>
           </p:cNvSpPr>
@@ -4429,7 +4429,7 @@
         <p:spPr bwMode="auto">
           <a:xfrm>
             <a:off x="719402" y="6442061"/>
-            <a:ext cx="2844799" cy="365125"/>
+            <a:ext cx="2844798" cy="365125"/>
           </a:xfrm>
           <a:prstGeom prst="rect">
             <a:avLst/>
@@ -4460,7 +4460,7 @@
       </p:sp>
       <p:sp>
         <p:nvSpPr>
-          <p:cNvPr id="195590293" name="Footer Placeholder 4"/>
+          <p:cNvPr id="210529348" name="Footer Placeholder 4"/>
           <p:cNvSpPr>
             <a:spLocks noGrp="1"/>
           </p:cNvSpPr>
@@ -4498,7 +4498,7 @@
       </p:sp>
       <p:sp>
         <p:nvSpPr>
-          <p:cNvPr id="55321635" name="Slide Number Placeholder 8"/>
+          <p:cNvPr id="1051789132" name="Slide Number Placeholder 8"/>
           <p:cNvSpPr>
             <a:spLocks noGrp="1"/>
           </p:cNvSpPr>
@@ -4559,7 +4559,7 @@
     <p:titleStyle>
       <a:lvl1pPr algn="ctr" defTabSz="914400" rtl="0">
         <a:spcBef>
-          <a:spcPts val="399"/>
+          <a:spcPts val="398"/>
         </a:spcBef>
         <a:buNone/>
         <a:defRPr sz="3600" b="0" cap="none" spc="0">
@@ -4585,7 +4585,7 @@
         </a:buClr>
         <a:buFont typeface="Arial"/>
         <a:buChar char="•"/>
-        <a:defRPr sz="2200" b="0" i="0" cap="none" spc="29">
+        <a:defRPr sz="2200" b="0" i="0" cap="none" spc="28">
           <a:solidFill>
             <a:schemeClr val="tx1">
               <a:lumMod val="85000"/>
@@ -4872,7 +4872,7 @@
       </p:grpSpPr>
       <p:sp>
         <p:nvSpPr>
-          <p:cNvPr id="1227913379" name="Title 1"/>
+          <p:cNvPr id="1006641103" name="Title 1"/>
           <p:cNvSpPr>
             <a:spLocks noGrp="1"/>
           </p:cNvSpPr>
@@ -4898,7 +4898,7 @@
       </p:sp>
       <p:sp>
         <p:nvSpPr>
-          <p:cNvPr id="2054226939" name="Subtitle 2"/>
+          <p:cNvPr id="1595149466" name="Subtitle 2"/>
           <p:cNvSpPr>
             <a:spLocks noGrp="1"/>
           </p:cNvSpPr>
@@ -4906,9 +4906,16 @@
             <p:ph type="subTitle" idx="1"/>
           </p:nvPr>
         </p:nvSpPr>
-        <p:spPr bwMode="auto"/>
-        <p:txBody>
-          <a:bodyPr/>
+        <p:spPr bwMode="auto">
+          <a:xfrm flipH="0" flipV="0">
+            <a:off x="2654098" y="4077070"/>
+            <a:ext cx="7237219" cy="1152126"/>
+          </a:xfrm>
+        </p:spPr>
+        <p:txBody>
+          <a:bodyPr vertOverflow="overflow" horzOverflow="overflow" vert="horz" wrap="square" lIns="91440" tIns="45720" rIns="91440" bIns="45720" numCol="1" spcCol="0" rtlCol="0" fromWordArt="0" anchor="t" anchorCtr="0" forceAA="0" upright="0" compatLnSpc="0">
+            <a:normAutofit/>
+          </a:bodyPr>
           <a:lstStyle/>
           <a:p>
             <a:pPr>
@@ -4929,6 +4936,32 @@
                 <a:cs typeface="Aptos"/>
               </a:rPr>
               <a:t>Keenan</a:t>
+            </a:r>
+            <a:endParaRPr lang="en-GB">
+              <a:latin typeface="Aptos"/>
+              <a:ea typeface="Aptos"/>
+              <a:cs typeface="Aptos"/>
+            </a:endParaRPr>
+          </a:p>
+          <a:p>
+            <a:pPr>
+              <a:defRPr/>
+            </a:pPr>
+            <a:r>
+              <a:rPr lang="en-GB" sz="2200">
+                <a:latin typeface="Aptos"/>
+                <a:ea typeface="Aptos"/>
+                <a:cs typeface="Aptos"/>
+              </a:rPr>
+              <a:t>Made using 360</a:t>
+            </a:r>
+            <a:r>
+              <a:rPr lang="en-GB" sz="2200">
+                <a:latin typeface="Aptos"/>
+                <a:ea typeface="Aptos"/>
+                <a:cs typeface="Aptos"/>
+              </a:rPr>
+              <a:t>-Degree Feedback Framework</a:t>
             </a:r>
             <a:endParaRPr lang="en-GB"/>
           </a:p>
@@ -4969,7 +5002,7 @@
       </p:grpSpPr>
       <p:sp>
         <p:nvSpPr>
-          <p:cNvPr id="872961725" name="Title 1"/>
+          <p:cNvPr id="640861023" name="Title 1"/>
           <p:cNvSpPr>
             <a:spLocks noGrp="1"/>
           </p:cNvSpPr>
@@ -5002,7 +5035,7 @@
       </p:sp>
       <p:sp>
         <p:nvSpPr>
-          <p:cNvPr id="1012326654" name="Content Placeholder 2"/>
+          <p:cNvPr id="1066000282" name="Content Placeholder 2"/>
           <p:cNvSpPr>
             <a:spLocks noGrp="1"/>
           </p:cNvSpPr>
@@ -5063,7 +5096,7 @@
               <a:defRPr/>
             </a:pPr>
             <a:r>
-              <a:rPr lang="en-GB" sz="2800" b="0" i="0" u="none" strike="noStrike" cap="none" spc="29">
+              <a:rPr lang="en-GB" sz="2800" b="0" i="0" u="none" strike="noStrike" cap="none" spc="28">
                 <a:solidFill>
                   <a:schemeClr val="tx1">
                     <a:lumMod val="85000"/>
@@ -5077,7 +5110,7 @@
               <a:t>Preferences</a:t>
             </a:r>
             <a:r>
-              <a:rPr lang="en-GB" sz="2800" b="0" i="0" u="none" strike="noStrike" cap="none" spc="29">
+              <a:rPr lang="en-GB" sz="2800" b="0" i="0" u="none" strike="noStrike" cap="none" spc="28">
                 <a:solidFill>
                   <a:schemeClr val="tx1">
                     <a:lumMod val="85000"/>
@@ -5090,7 +5123,7 @@
               </a:rPr>
               <a:t>:</a:t>
             </a:r>
-            <a:endParaRPr sz="2800" b="0" i="0" u="none" strike="noStrike" cap="none" spc="29">
+            <a:endParaRPr sz="2800" b="0" i="0" u="none" strike="noStrike" cap="none" spc="28">
               <a:solidFill>
                 <a:schemeClr val="tx1">
                   <a:lumMod val="85000"/>
@@ -5106,7 +5139,7 @@
               <a:defRPr/>
             </a:pPr>
             <a:r>
-              <a:rPr lang="en-GB" sz="2800" b="0" i="0" u="none" strike="noStrike" cap="none" spc="29">
+              <a:rPr lang="en-GB" sz="2800" b="0" i="0" u="none" strike="noStrike" cap="none" spc="28">
                 <a:solidFill>
                   <a:schemeClr val="tx1">
                     <a:lumMod val="85000"/>
@@ -5119,7 +5152,7 @@
               </a:rPr>
               <a:t>Studious, eager to teach</a:t>
             </a:r>
-            <a:endParaRPr sz="2800" b="0" i="0" u="none" strike="noStrike" cap="none" spc="29">
+            <a:endParaRPr sz="2800" b="0" i="0" u="none" strike="noStrike" cap="none" spc="28">
               <a:solidFill>
                 <a:schemeClr val="tx1">
                   <a:lumMod val="85000"/>
@@ -5135,7 +5168,7 @@
               <a:defRPr/>
             </a:pPr>
             <a:r>
-              <a:rPr lang="en-GB" sz="2800" b="0" i="0" u="none" strike="noStrike" cap="none" spc="29">
+              <a:rPr lang="en-GB" sz="2800" b="0" i="0" u="none" strike="noStrike" cap="none" spc="28">
                 <a:solidFill>
                   <a:schemeClr val="tx1">
                     <a:lumMod val="85000"/>
@@ -5148,7 +5181,7 @@
               </a:rPr>
               <a:t>Wants to break things down to really understand</a:t>
             </a:r>
-            <a:endParaRPr sz="2800" b="0" i="0" u="none" strike="noStrike" cap="none" spc="29">
+            <a:endParaRPr sz="2800" b="0" i="0" u="none" strike="noStrike" cap="none" spc="28">
               <a:solidFill>
                 <a:schemeClr val="tx1">
                   <a:lumMod val="85000"/>
@@ -5168,7 +5201,7 @@
               <a:buNone/>
               <a:defRPr/>
             </a:pPr>
-            <a:endParaRPr sz="2800" b="0" i="0" u="none" strike="noStrike" cap="none" spc="29">
+            <a:endParaRPr sz="2800" b="0" i="0" u="none" strike="noStrike" cap="none" spc="28">
               <a:solidFill>
                 <a:schemeClr val="tx1">
                   <a:lumMod val="85000"/>
@@ -5189,7 +5222,7 @@
               <a:defRPr/>
             </a:pPr>
             <a:r>
-              <a:rPr lang="en-GB" sz="2800" b="0" i="0" u="none" strike="noStrike" cap="none" spc="29">
+              <a:rPr lang="en-GB" sz="2800" b="0" i="0" u="none" strike="noStrike" cap="none" spc="28">
                 <a:solidFill>
                   <a:schemeClr val="tx1">
                     <a:lumMod val="85000"/>
@@ -5202,7 +5235,7 @@
               </a:rPr>
               <a:t>Motivators:</a:t>
             </a:r>
-            <a:endParaRPr sz="2800" b="0" i="0" u="none" strike="noStrike" cap="none" spc="29">
+            <a:endParaRPr sz="2800" b="0" i="0" u="none" strike="noStrike" cap="none" spc="28">
               <a:solidFill>
                 <a:schemeClr val="tx1">
                   <a:lumMod val="85000"/>
@@ -5218,7 +5251,7 @@
               <a:defRPr/>
             </a:pPr>
             <a:r>
-              <a:rPr lang="en-GB" sz="2800" b="0" i="0" u="none" strike="noStrike" cap="none" spc="29">
+              <a:rPr lang="en-GB" sz="2800" b="0" i="0" u="none" strike="noStrike" cap="none" spc="28">
                 <a:solidFill>
                   <a:schemeClr val="tx1">
                     <a:lumMod val="85000"/>
@@ -5231,7 +5264,7 @@
               </a:rPr>
               <a:t>Learning/building</a:t>
             </a:r>
-            <a:endParaRPr sz="2800" b="0" i="0" u="none" strike="noStrike" cap="none" spc="29">
+            <a:endParaRPr sz="2800" b="0" i="0" u="none" strike="noStrike" cap="none" spc="28">
               <a:solidFill>
                 <a:schemeClr val="tx1">
                   <a:lumMod val="85000"/>
@@ -5247,7 +5280,7 @@
               <a:defRPr/>
             </a:pPr>
             <a:r>
-              <a:rPr lang="en-GB" sz="2800" b="0" i="0" u="none" strike="noStrike" cap="none" spc="29">
+              <a:rPr lang="en-GB" sz="2800" b="0" i="0" u="none" strike="noStrike" cap="none" spc="28">
                 <a:solidFill>
                   <a:schemeClr val="tx1">
                     <a:lumMod val="85000"/>
@@ -5283,7 +5316,7 @@
       </p:sp>
       <p:sp>
         <p:nvSpPr>
-          <p:cNvPr id="1399739369" name="Content Placeholder 3"/>
+          <p:cNvPr id="1012298517" name="Content Placeholder 3"/>
           <p:cNvSpPr>
             <a:spLocks noGrp="1"/>
           </p:cNvSpPr>
@@ -5342,7 +5375,7 @@
               <a:defRPr/>
             </a:pPr>
             <a:r>
-              <a:rPr lang="en-GB" sz="2800" b="0" i="0" u="none" strike="noStrike" cap="none" spc="29">
+              <a:rPr lang="en-GB" sz="2800" b="0" i="0" u="none" strike="noStrike" cap="none" spc="28">
                 <a:solidFill>
                   <a:schemeClr val="tx1">
                     <a:lumMod val="85000"/>
@@ -5355,7 +5388,7 @@
               </a:rPr>
               <a:t>Strengths:</a:t>
             </a:r>
-            <a:endParaRPr lang="en-GB" sz="2800" b="0" i="0" u="none" strike="noStrike" cap="none" spc="29">
+            <a:endParaRPr lang="en-GB" sz="2800" b="0" i="0" u="none" strike="noStrike" cap="none" spc="28">
               <a:solidFill>
                 <a:schemeClr val="tx1">
                   <a:lumMod val="85000"/>
@@ -5371,7 +5404,7 @@
               <a:defRPr/>
             </a:pPr>
             <a:r>
-              <a:rPr lang="en-GB" sz="2800" b="0" i="0" u="none" strike="noStrike" cap="none" spc="29">
+              <a:rPr lang="en-GB" sz="2800" b="0" i="0" u="none" strike="noStrike" cap="none" spc="28">
                 <a:solidFill>
                   <a:schemeClr val="tx1">
                     <a:lumMod val="85000"/>
@@ -5384,7 +5417,7 @@
               </a:rPr>
               <a:t>Driven</a:t>
             </a:r>
-            <a:endParaRPr lang="en-GB" sz="2800" b="0" i="0" u="none" strike="noStrike" cap="none" spc="29">
+            <a:endParaRPr lang="en-GB" sz="2800" b="0" i="0" u="none" strike="noStrike" cap="none" spc="28">
               <a:solidFill>
                 <a:schemeClr val="tx1">
                   <a:lumMod val="85000"/>
@@ -5400,7 +5433,7 @@
               <a:defRPr/>
             </a:pPr>
             <a:r>
-              <a:rPr lang="en-GB" sz="2800" b="0" i="0" u="none" strike="noStrike" cap="none" spc="29">
+              <a:rPr lang="en-GB" sz="2800" b="0" i="0" u="none" strike="noStrike" cap="none" spc="28">
                 <a:solidFill>
                   <a:schemeClr val="tx1">
                     <a:lumMod val="85000"/>
@@ -5413,7 +5446,7 @@
               </a:rPr>
               <a:t>Consistent &amp; reliable</a:t>
             </a:r>
-            <a:endParaRPr lang="en-GB" sz="2800" b="0" i="0" u="none" strike="noStrike" cap="none" spc="29">
+            <a:endParaRPr lang="en-GB" sz="2800" b="0" i="0" u="none" strike="noStrike" cap="none" spc="28">
               <a:solidFill>
                 <a:schemeClr val="tx1">
                   <a:lumMod val="85000"/>
@@ -5429,7 +5462,7 @@
               <a:defRPr/>
             </a:pPr>
             <a:r>
-              <a:rPr lang="en-GB" sz="2800" b="0" i="0" u="none" strike="noStrike" cap="none" spc="29">
+              <a:rPr lang="en-GB" sz="2800" b="0" i="0" u="none" strike="noStrike" cap="none" spc="28">
                 <a:solidFill>
                   <a:schemeClr val="tx1">
                     <a:lumMod val="85000"/>
@@ -5442,7 +5475,7 @@
               </a:rPr>
               <a:t>Versatile</a:t>
             </a:r>
-            <a:endParaRPr lang="en-GB" sz="2800" b="0" i="0" u="none" strike="noStrike" cap="none" spc="29">
+            <a:endParaRPr lang="en-GB" sz="2800" b="0" i="0" u="none" strike="noStrike" cap="none" spc="28">
               <a:solidFill>
                 <a:schemeClr val="tx1">
                   <a:lumMod val="85000"/>
@@ -5457,7 +5490,7 @@
             <a:pPr>
               <a:defRPr/>
             </a:pPr>
-            <a:endParaRPr lang="en-GB" sz="2800" b="0" i="0" u="none" strike="noStrike" cap="none" spc="29">
+            <a:endParaRPr lang="en-GB" sz="2800" b="0" i="0" u="none" strike="noStrike" cap="none" spc="28">
               <a:solidFill>
                 <a:schemeClr val="tx1">
                   <a:lumMod val="85000"/>
@@ -5478,7 +5511,7 @@
               <a:defRPr/>
             </a:pPr>
             <a:r>
-              <a:rPr lang="en-GB" sz="2800" b="0" i="0" u="none" strike="noStrike" cap="none" spc="29">
+              <a:rPr lang="en-GB" sz="2800" b="0" i="0" u="none" strike="noStrike" cap="none" spc="28">
                 <a:solidFill>
                   <a:schemeClr val="tx1">
                     <a:lumMod val="85000"/>
@@ -5491,7 +5524,7 @@
               </a:rPr>
               <a:t>Limitations:</a:t>
             </a:r>
-            <a:endParaRPr lang="en-GB" sz="2800" b="0" i="0" u="none" strike="noStrike" cap="none" spc="29">
+            <a:endParaRPr lang="en-GB" sz="2800" b="0" i="0" u="none" strike="noStrike" cap="none" spc="28">
               <a:solidFill>
                 <a:schemeClr val="tx1">
                   <a:lumMod val="85000"/>
@@ -5507,7 +5540,7 @@
               <a:defRPr/>
             </a:pPr>
             <a:r>
-              <a:rPr lang="en-GB" sz="2800" b="0" i="0" u="none" strike="noStrike" cap="none" spc="29">
+              <a:rPr lang="en-GB" sz="2800" b="0" i="0" u="none" strike="noStrike" cap="none" spc="28">
                 <a:solidFill>
                   <a:schemeClr val="tx1">
                     <a:lumMod val="85000"/>
@@ -5520,7 +5553,7 @@
               </a:rPr>
               <a:t>Get caught on over-explaining</a:t>
             </a:r>
-            <a:endParaRPr lang="en-GB" sz="2800" b="0" i="0" u="none" strike="noStrike" cap="none" spc="29">
+            <a:endParaRPr lang="en-GB" sz="2800" b="0" i="0" u="none" strike="noStrike" cap="none" spc="28">
               <a:solidFill>
                 <a:schemeClr val="tx1">
                   <a:lumMod val="85000"/>
@@ -5536,7 +5569,7 @@
               <a:defRPr/>
             </a:pPr>
             <a:r>
-              <a:rPr lang="en-GB" sz="2800" b="0" i="0" u="none" strike="noStrike" cap="none" spc="29">
+              <a:rPr lang="en-GB" sz="2800" b="0" i="0" u="none" strike="noStrike" cap="none" spc="28">
                 <a:solidFill>
                   <a:schemeClr val="tx1">
                     <a:lumMod val="85000"/>
@@ -5549,7 +5582,7 @@
               </a:rPr>
               <a:t>Communication confusing</a:t>
             </a:r>
-            <a:endParaRPr lang="en-GB" sz="2800" b="0" i="0" u="none" strike="noStrike" cap="none" spc="29">
+            <a:endParaRPr lang="en-GB" sz="2800" b="0" i="0" u="none" strike="noStrike" cap="none" spc="28">
               <a:solidFill>
                 <a:schemeClr val="tx1">
                   <a:lumMod val="85000"/>
@@ -5597,7 +5630,7 @@
       </p:grpSpPr>
       <p:sp>
         <p:nvSpPr>
-          <p:cNvPr id="1325260468" name="Title 1"/>
+          <p:cNvPr id="1476296908" name="Title 1"/>
           <p:cNvSpPr>
             <a:spLocks noGrp="1"/>
           </p:cNvSpPr>
@@ -5630,7 +5663,7 @@
       </p:sp>
       <p:sp>
         <p:nvSpPr>
-          <p:cNvPr id="1198894610" name="Content Placeholder 2"/>
+          <p:cNvPr id="267744397" name="Content Placeholder 2"/>
           <p:cNvSpPr>
             <a:spLocks noGrp="1"/>
           </p:cNvSpPr>
@@ -5691,7 +5724,7 @@
               <a:defRPr/>
             </a:pPr>
             <a:r>
-              <a:rPr lang="en-GB" sz="2800" b="0" i="0" u="none" strike="noStrike" cap="none" spc="29">
+              <a:rPr lang="en-GB" sz="2800" b="0" i="0" u="none" strike="noStrike" cap="none" spc="28">
                 <a:solidFill>
                   <a:schemeClr val="tx1">
                     <a:lumMod val="85000"/>
@@ -5705,7 +5738,7 @@
               <a:t>Preferences</a:t>
             </a:r>
             <a:r>
-              <a:rPr lang="en-GB" sz="2800" b="0" i="0" u="none" strike="noStrike" cap="none" spc="29">
+              <a:rPr lang="en-GB" sz="2800" b="0" i="0" u="none" strike="noStrike" cap="none" spc="28">
                 <a:solidFill>
                   <a:schemeClr val="tx1">
                     <a:lumMod val="85000"/>
@@ -5718,7 +5751,7 @@
               </a:rPr>
               <a:t>:</a:t>
             </a:r>
-            <a:endParaRPr sz="2800" b="0" i="0" u="none" strike="noStrike" cap="none" spc="29">
+            <a:endParaRPr sz="2800" b="0" i="0" u="none" strike="noStrike" cap="none" spc="28">
               <a:solidFill>
                 <a:schemeClr val="tx1">
                   <a:lumMod val="85000"/>
@@ -5734,7 +5767,7 @@
               <a:defRPr/>
             </a:pPr>
             <a:r>
-              <a:rPr lang="en-GB" sz="2800" b="0" i="0" u="none" strike="noStrike" cap="none" spc="29">
+              <a:rPr lang="en-GB" sz="2800" b="0" i="0" u="none" strike="noStrike" cap="none" spc="28">
                 <a:solidFill>
                   <a:schemeClr val="tx1">
                     <a:lumMod val="85000"/>
@@ -5747,7 +5780,7 @@
               </a:rPr>
               <a:t>Clarity</a:t>
             </a:r>
-            <a:endParaRPr lang="en-GB" sz="2800" b="0" i="0" u="none" strike="noStrike" cap="none" spc="29">
+            <a:endParaRPr lang="en-GB" sz="2800" b="0" i="0" u="none" strike="noStrike" cap="none" spc="28">
               <a:solidFill>
                 <a:schemeClr val="tx1">
                   <a:lumMod val="85000"/>
@@ -5764,7 +5797,7 @@
               <a:defRPr/>
             </a:pPr>
             <a:r>
-              <a:rPr lang="en-GB" sz="2800" b="0" i="0" u="none" strike="noStrike" cap="none" spc="29">
+              <a:rPr lang="en-GB" sz="2800" b="0" i="0" u="none" strike="noStrike" cap="none" spc="28">
                 <a:solidFill>
                   <a:schemeClr val="tx1">
                     <a:lumMod val="85000"/>
@@ -5777,7 +5810,7 @@
               </a:rPr>
               <a:t>Wants to contribute feasibly</a:t>
             </a:r>
-            <a:endParaRPr sz="2800" b="0" i="0" u="none" strike="noStrike" cap="none" spc="29">
+            <a:endParaRPr sz="2800" b="0" i="0" u="none" strike="noStrike" cap="none" spc="28">
               <a:solidFill>
                 <a:schemeClr val="tx1">
                   <a:lumMod val="85000"/>
@@ -5797,7 +5830,7 @@
               <a:buNone/>
               <a:defRPr/>
             </a:pPr>
-            <a:endParaRPr sz="2800" b="0" i="0" u="none" strike="noStrike" cap="none" spc="29">
+            <a:endParaRPr sz="2800" b="0" i="0" u="none" strike="noStrike" cap="none" spc="28">
               <a:solidFill>
                 <a:schemeClr val="tx1">
                   <a:lumMod val="85000"/>
@@ -5818,7 +5851,7 @@
               <a:defRPr/>
             </a:pPr>
             <a:r>
-              <a:rPr lang="en-GB" sz="2800" b="0" i="0" u="none" strike="noStrike" cap="none" spc="29">
+              <a:rPr lang="en-GB" sz="2800" b="0" i="0" u="none" strike="noStrike" cap="none" spc="28">
                 <a:solidFill>
                   <a:schemeClr val="tx1">
                     <a:lumMod val="85000"/>
@@ -5831,7 +5864,7 @@
               </a:rPr>
               <a:t>Motivators:</a:t>
             </a:r>
-            <a:endParaRPr sz="2800" b="0" i="0" u="none" strike="noStrike" cap="none" spc="29">
+            <a:endParaRPr sz="2800" b="0" i="0" u="none" strike="noStrike" cap="none" spc="28">
               <a:solidFill>
                 <a:schemeClr val="tx1">
                   <a:lumMod val="85000"/>
@@ -5847,7 +5880,7 @@
               <a:defRPr/>
             </a:pPr>
             <a:r>
-              <a:rPr sz="2800" b="0" i="0" u="none" strike="noStrike" cap="none" spc="29">
+              <a:rPr sz="2800" b="0" i="0" u="none" strike="noStrike" cap="none" spc="28">
                 <a:solidFill>
                   <a:schemeClr val="tx1">
                     <a:lumMod val="85000"/>
@@ -5859,7 +5892,7 @@
               </a:rPr>
               <a:t>Wants to contribute meaningfully</a:t>
             </a:r>
-            <a:endParaRPr sz="2800" b="0" i="0" u="none" strike="noStrike" cap="none" spc="29">
+            <a:endParaRPr sz="2800" b="0" i="0" u="none" strike="noStrike" cap="none" spc="28">
               <a:solidFill>
                 <a:schemeClr val="tx1">
                   <a:lumMod val="85000"/>
@@ -5904,7 +5937,7 @@
       </p:sp>
       <p:sp>
         <p:nvSpPr>
-          <p:cNvPr id="1671821838" name="Content Placeholder 3"/>
+          <p:cNvPr id="12871220" name="Content Placeholder 3"/>
           <p:cNvSpPr>
             <a:spLocks noGrp="1"/>
           </p:cNvSpPr>
@@ -5963,7 +5996,7 @@
               <a:defRPr/>
             </a:pPr>
             <a:r>
-              <a:rPr lang="en-GB" sz="2800" b="0" i="0" u="none" strike="noStrike" cap="none" spc="29">
+              <a:rPr lang="en-GB" sz="2800" b="0" i="0" u="none" strike="noStrike" cap="none" spc="28">
                 <a:solidFill>
                   <a:schemeClr val="tx1">
                     <a:lumMod val="85000"/>
@@ -5976,7 +6009,7 @@
               </a:rPr>
               <a:t>Strengths:</a:t>
             </a:r>
-            <a:endParaRPr lang="en-GB" sz="2800" b="0" i="0" u="none" strike="noStrike" cap="none" spc="29">
+            <a:endParaRPr lang="en-GB" sz="2800" b="0" i="0" u="none" strike="noStrike" cap="none" spc="28">
               <a:solidFill>
                 <a:schemeClr val="tx1">
                   <a:lumMod val="85000"/>
@@ -5992,7 +6025,7 @@
               <a:defRPr/>
             </a:pPr>
             <a:r>
-              <a:rPr lang="en-GB" sz="2800" b="0" i="0" u="none" strike="noStrike" cap="none" spc="29">
+              <a:rPr lang="en-GB" sz="2800" b="0" i="0" u="none" strike="noStrike" cap="none" spc="28">
                 <a:solidFill>
                   <a:schemeClr val="tx1">
                     <a:lumMod val="85000"/>
@@ -6005,7 +6038,7 @@
               </a:rPr>
               <a:t>Open attitude, grounded</a:t>
             </a:r>
-            <a:endParaRPr lang="en-GB" sz="2800" b="0" i="0" u="none" strike="noStrike" cap="none" spc="29">
+            <a:endParaRPr lang="en-GB" sz="2800" b="0" i="0" u="none" strike="noStrike" cap="none" spc="28">
               <a:solidFill>
                 <a:schemeClr val="tx1">
                   <a:lumMod val="85000"/>
@@ -6021,7 +6054,7 @@
               <a:defRPr/>
             </a:pPr>
             <a:r>
-              <a:rPr lang="en-GB" sz="2800" b="0" i="0" u="none" strike="noStrike" cap="none" spc="29">
+              <a:rPr lang="en-GB" sz="2800" b="0" i="0" u="none" strike="noStrike" cap="none" spc="28">
                 <a:solidFill>
                   <a:schemeClr val="tx1">
                     <a:lumMod val="85000"/>
@@ -6034,7 +6067,7 @@
               </a:rPr>
               <a:t>Consistent &amp; reliable</a:t>
             </a:r>
-            <a:endParaRPr lang="en-GB" sz="2800" b="0" i="0" u="none" strike="noStrike" cap="none" spc="29">
+            <a:endParaRPr lang="en-GB" sz="2800" b="0" i="0" u="none" strike="noStrike" cap="none" spc="28">
               <a:solidFill>
                 <a:schemeClr val="tx1">
                   <a:lumMod val="85000"/>
@@ -6050,7 +6083,7 @@
               <a:defRPr/>
             </a:pPr>
             <a:r>
-              <a:rPr lang="en-GB" sz="2800" b="0" i="0" u="none" strike="noStrike" cap="none" spc="29">
+              <a:rPr lang="en-GB" sz="2800" b="0" i="0" u="none" strike="noStrike" cap="none" spc="28">
                 <a:solidFill>
                   <a:schemeClr val="tx1">
                     <a:lumMod val="85000"/>
@@ -6063,7 +6096,7 @@
               </a:rPr>
               <a:t>Honest &amp; consistent communication</a:t>
             </a:r>
-            <a:endParaRPr lang="en-GB" sz="2800" b="0" i="0" u="none" strike="noStrike" cap="none" spc="29">
+            <a:endParaRPr lang="en-GB" sz="2800" b="0" i="0" u="none" strike="noStrike" cap="none" spc="28">
               <a:solidFill>
                 <a:schemeClr val="tx1">
                   <a:lumMod val="85000"/>
@@ -6078,7 +6111,7 @@
             <a:pPr>
               <a:defRPr/>
             </a:pPr>
-            <a:endParaRPr lang="en-GB" sz="2800" b="0" i="0" u="none" strike="noStrike" cap="none" spc="29">
+            <a:endParaRPr lang="en-GB" sz="2800" b="0" i="0" u="none" strike="noStrike" cap="none" spc="28">
               <a:solidFill>
                 <a:schemeClr val="tx1">
                   <a:lumMod val="85000"/>
@@ -6099,7 +6132,7 @@
               <a:defRPr/>
             </a:pPr>
             <a:r>
-              <a:rPr lang="en-GB" sz="2800" b="0" i="0" u="none" strike="noStrike" cap="none" spc="29">
+              <a:rPr lang="en-GB" sz="2800" b="0" i="0" u="none" strike="noStrike" cap="none" spc="28">
                 <a:solidFill>
                   <a:schemeClr val="tx1">
                     <a:lumMod val="85000"/>
@@ -6112,7 +6145,7 @@
               </a:rPr>
               <a:t>Limitations:</a:t>
             </a:r>
-            <a:endParaRPr lang="en-GB" sz="2800" b="0" i="0" u="none" strike="noStrike" cap="none" spc="29">
+            <a:endParaRPr lang="en-GB" sz="2800" b="0" i="0" u="none" strike="noStrike" cap="none" spc="28">
               <a:solidFill>
                 <a:schemeClr val="tx1">
                   <a:lumMod val="85000"/>
@@ -6128,7 +6161,7 @@
               <a:defRPr/>
             </a:pPr>
             <a:r>
-              <a:rPr lang="en-GB" sz="2800" b="0" i="0" u="none" strike="noStrike" cap="none" spc="29">
+              <a:rPr lang="en-GB" sz="2800" b="0" i="0" u="none" strike="noStrike" cap="none" spc="28">
                 <a:solidFill>
                   <a:schemeClr val="tx1">
                     <a:lumMod val="85000"/>
@@ -6141,7 +6174,7 @@
               </a:rPr>
               <a:t>Confidence </a:t>
             </a:r>
-            <a:endParaRPr lang="en-GB" sz="2800" b="0" i="0" u="none" strike="noStrike" cap="none" spc="29">
+            <a:endParaRPr lang="en-GB" sz="2800" b="0" i="0" u="none" strike="noStrike" cap="none" spc="28">
               <a:solidFill>
                 <a:schemeClr val="tx1">
                   <a:lumMod val="85000"/>
@@ -6157,7 +6190,7 @@
               <a:defRPr/>
             </a:pPr>
             <a:r>
-              <a:rPr lang="en-GB" sz="2800" b="0" i="0" u="none" strike="noStrike" cap="none" spc="29">
+              <a:rPr lang="en-GB" sz="2800" b="0" i="0" u="none" strike="noStrike" cap="none" spc="28">
                 <a:solidFill>
                   <a:schemeClr val="tx1">
                     <a:lumMod val="85000"/>
@@ -6170,7 +6203,7 @@
               </a:rPr>
               <a:t>Experience</a:t>
             </a:r>
-            <a:endParaRPr lang="en-GB" sz="2800" b="0" i="0" u="none" strike="noStrike" cap="none" spc="29">
+            <a:endParaRPr lang="en-GB" sz="2800" b="0" i="0" u="none" strike="noStrike" cap="none" spc="28">
               <a:solidFill>
                 <a:schemeClr val="tx1">
                   <a:lumMod val="85000"/>
@@ -6218,7 +6251,7 @@
       </p:grpSpPr>
       <p:sp>
         <p:nvSpPr>
-          <p:cNvPr id="1488203452" name="Title 1"/>
+          <p:cNvPr id="77181676" name="Title 1"/>
           <p:cNvSpPr>
             <a:spLocks noGrp="1"/>
           </p:cNvSpPr>
@@ -6251,7 +6284,7 @@
       </p:sp>
       <p:sp>
         <p:nvSpPr>
-          <p:cNvPr id="2047559890" name="Content Placeholder 2"/>
+          <p:cNvPr id="323208388" name="Content Placeholder 2"/>
           <p:cNvSpPr>
             <a:spLocks noGrp="1"/>
           </p:cNvSpPr>
@@ -6312,7 +6345,7 @@
               <a:defRPr/>
             </a:pPr>
             <a:r>
-              <a:rPr lang="en-GB" sz="2800" b="0" i="0" u="none" strike="noStrike" cap="none" spc="29">
+              <a:rPr lang="en-GB" sz="2800" b="0" i="0" u="none" strike="noStrike" cap="none" spc="28">
                 <a:solidFill>
                   <a:schemeClr val="tx1">
                     <a:lumMod val="85000"/>
@@ -6326,7 +6359,7 @@
               <a:t>Preferences</a:t>
             </a:r>
             <a:r>
-              <a:rPr lang="en-GB" sz="2800" b="0" i="0" u="none" strike="noStrike" cap="none" spc="29">
+              <a:rPr lang="en-GB" sz="2800" b="0" i="0" u="none" strike="noStrike" cap="none" spc="28">
                 <a:solidFill>
                   <a:schemeClr val="tx1">
                     <a:lumMod val="85000"/>
@@ -6339,7 +6372,7 @@
               </a:rPr>
               <a:t>:</a:t>
             </a:r>
-            <a:endParaRPr sz="2800" b="0" i="0" u="none" strike="noStrike" cap="none" spc="29">
+            <a:endParaRPr sz="2800" b="0" i="0" u="none" strike="noStrike" cap="none" spc="28">
               <a:solidFill>
                 <a:schemeClr val="tx1">
                   <a:lumMod val="85000"/>
@@ -6355,7 +6388,7 @@
               <a:defRPr/>
             </a:pPr>
             <a:r>
-              <a:rPr lang="en-GB" sz="2800" b="0" i="0" u="none" strike="noStrike" cap="none" spc="29">
+              <a:rPr lang="en-GB" sz="2800" b="0" i="0" u="none" strike="noStrike" cap="none" spc="28">
                 <a:solidFill>
                   <a:schemeClr val="tx1">
                     <a:lumMod val="85000"/>
@@ -6368,7 +6401,7 @@
               </a:rPr>
               <a:t>Studious, theoretical</a:t>
             </a:r>
-            <a:endParaRPr sz="2800" b="0" i="0" u="none" strike="noStrike" cap="none" spc="29">
+            <a:endParaRPr sz="2800" b="0" i="0" u="none" strike="noStrike" cap="none" spc="28">
               <a:solidFill>
                 <a:schemeClr val="tx1">
                   <a:lumMod val="85000"/>
@@ -6384,7 +6417,7 @@
               <a:defRPr/>
             </a:pPr>
             <a:r>
-              <a:rPr lang="en-GB" sz="2800" b="0" i="0" u="none" strike="noStrike" cap="none" spc="29">
+              <a:rPr lang="en-GB" sz="2800" b="0" i="0" u="none" strike="noStrike" cap="none" spc="28">
                 <a:solidFill>
                   <a:schemeClr val="tx1">
                     <a:lumMod val="85000"/>
@@ -6397,7 +6430,7 @@
               </a:rPr>
               <a:t>Prefers smaller teams</a:t>
             </a:r>
-            <a:endParaRPr sz="2800" b="0" i="0" u="none" strike="noStrike" cap="none" spc="29">
+            <a:endParaRPr sz="2800" b="0" i="0" u="none" strike="noStrike" cap="none" spc="28">
               <a:solidFill>
                 <a:schemeClr val="tx1">
                   <a:lumMod val="85000"/>
@@ -6417,7 +6450,7 @@
               <a:buNone/>
               <a:defRPr/>
             </a:pPr>
-            <a:endParaRPr sz="2800" b="0" i="0" u="none" strike="noStrike" cap="none" spc="29">
+            <a:endParaRPr sz="2800" b="0" i="0" u="none" strike="noStrike" cap="none" spc="28">
               <a:solidFill>
                 <a:schemeClr val="tx1">
                   <a:lumMod val="85000"/>
@@ -6438,7 +6471,7 @@
               <a:defRPr/>
             </a:pPr>
             <a:r>
-              <a:rPr lang="en-GB" sz="2800" b="0" i="0" u="none" strike="noStrike" cap="none" spc="29">
+              <a:rPr lang="en-GB" sz="2800" b="0" i="0" u="none" strike="noStrike" cap="none" spc="28">
                 <a:solidFill>
                   <a:schemeClr val="tx1">
                     <a:lumMod val="85000"/>
@@ -6451,7 +6484,7 @@
               </a:rPr>
               <a:t>Motivators:</a:t>
             </a:r>
-            <a:endParaRPr sz="2800" b="0" i="0" u="none" strike="noStrike" cap="none" spc="29">
+            <a:endParaRPr sz="2800" b="0" i="0" u="none" strike="noStrike" cap="none" spc="28">
               <a:solidFill>
                 <a:schemeClr val="tx1">
                   <a:lumMod val="85000"/>
@@ -6467,7 +6500,7 @@
               <a:defRPr/>
             </a:pPr>
             <a:r>
-              <a:rPr lang="en-GB" sz="2800" b="0" i="0" u="none" strike="noStrike" cap="none" spc="29">
+              <a:rPr lang="en-GB" sz="2800" b="0" i="0" u="none" strike="noStrike" cap="none" spc="28">
                 <a:solidFill>
                   <a:schemeClr val="tx1">
                     <a:lumMod val="85000"/>
@@ -6480,7 +6513,7 @@
               </a:rPr>
               <a:t>Learning</a:t>
             </a:r>
-            <a:endParaRPr lang="en-GB" sz="2800" b="0" i="0" u="none" strike="noStrike" cap="none" spc="29">
+            <a:endParaRPr lang="en-GB" sz="2800" b="0" i="0" u="none" strike="noStrike" cap="none" spc="28">
               <a:solidFill>
                 <a:schemeClr val="tx1">
                   <a:lumMod val="85000"/>
@@ -6497,7 +6530,7 @@
               <a:defRPr/>
             </a:pPr>
             <a:r>
-              <a:rPr sz="2800" b="0" i="0" u="none" strike="noStrike" cap="none" spc="29">
+              <a:rPr sz="2800" b="0" i="0" u="none" strike="noStrike" cap="none" spc="28">
                 <a:solidFill>
                   <a:schemeClr val="tx1">
                     <a:lumMod val="85000"/>
@@ -6509,7 +6542,7 @@
               </a:rPr>
               <a:t>Solution-oriented</a:t>
             </a:r>
-            <a:endParaRPr sz="2800" b="0" i="0" u="none" strike="noStrike" cap="none" spc="29">
+            <a:endParaRPr sz="2800" b="0" i="0" u="none" strike="noStrike" cap="none" spc="28">
               <a:solidFill>
                 <a:schemeClr val="tx1">
                   <a:lumMod val="85000"/>
@@ -6525,7 +6558,7 @@
               <a:defRPr/>
             </a:pPr>
             <a:r>
-              <a:rPr lang="en-GB" sz="2800" b="0" i="0" u="none" strike="noStrike" cap="none" spc="29">
+              <a:rPr lang="en-GB" sz="2800" b="0" i="0" u="none" strike="noStrike" cap="none" spc="28">
                 <a:solidFill>
                   <a:schemeClr val="tx1">
                     <a:lumMod val="85000"/>
@@ -6561,7 +6594,7 @@
       </p:sp>
       <p:sp>
         <p:nvSpPr>
-          <p:cNvPr id="463347969" name="Content Placeholder 3"/>
+          <p:cNvPr id="27275601" name="Content Placeholder 3"/>
           <p:cNvSpPr>
             <a:spLocks noGrp="1"/>
           </p:cNvSpPr>
@@ -6622,7 +6655,7 @@
               <a:defRPr/>
             </a:pPr>
             <a:r>
-              <a:rPr lang="en-GB" sz="2800" b="0" i="0" u="none" strike="noStrike" cap="none" spc="29">
+              <a:rPr lang="en-GB" sz="2800" b="0" i="0" u="none" strike="noStrike" cap="none" spc="28">
                 <a:solidFill>
                   <a:schemeClr val="tx1">
                     <a:lumMod val="85000"/>
@@ -6635,7 +6668,7 @@
               </a:rPr>
               <a:t>Strengths:</a:t>
             </a:r>
-            <a:endParaRPr lang="en-GB" sz="2800" b="0" i="0" u="none" strike="noStrike" cap="none" spc="29">
+            <a:endParaRPr lang="en-GB" sz="2800" b="0" i="0" u="none" strike="noStrike" cap="none" spc="28">
               <a:solidFill>
                 <a:schemeClr val="tx1">
                   <a:lumMod val="85000"/>
@@ -6651,7 +6684,7 @@
               <a:defRPr/>
             </a:pPr>
             <a:r>
-              <a:rPr lang="en-GB" sz="2800" b="0" i="0" u="none" strike="noStrike" cap="none" spc="29">
+              <a:rPr lang="en-GB" sz="2800" b="0" i="0" u="none" strike="noStrike" cap="none" spc="28">
                 <a:solidFill>
                   <a:schemeClr val="tx1">
                     <a:lumMod val="85000"/>
@@ -6664,7 +6697,7 @@
               </a:rPr>
               <a:t>Intelligent</a:t>
             </a:r>
-            <a:endParaRPr lang="en-GB" sz="2800" b="0" i="0" u="none" strike="noStrike" cap="none" spc="29">
+            <a:endParaRPr lang="en-GB" sz="2800" b="0" i="0" u="none" strike="noStrike" cap="none" spc="28">
               <a:solidFill>
                 <a:schemeClr val="tx1">
                   <a:lumMod val="85000"/>
@@ -6680,7 +6713,7 @@
               <a:defRPr/>
             </a:pPr>
             <a:r>
-              <a:rPr lang="en-GB" sz="2800" b="0" i="0" u="none" strike="noStrike" cap="none" spc="29">
+              <a:rPr lang="en-GB" sz="2800" b="0" i="0" u="none" strike="noStrike" cap="none" spc="28">
                 <a:solidFill>
                   <a:schemeClr val="tx1">
                     <a:lumMod val="85000"/>
@@ -6693,7 +6726,7 @@
               </a:rPr>
               <a:t>Driven if interested</a:t>
             </a:r>
-            <a:endParaRPr lang="en-GB" sz="2800" b="0" i="0" u="none" strike="noStrike" cap="none" spc="29">
+            <a:endParaRPr lang="en-GB" sz="2800" b="0" i="0" u="none" strike="noStrike" cap="none" spc="28">
               <a:solidFill>
                 <a:schemeClr val="tx1">
                   <a:lumMod val="85000"/>
@@ -6709,7 +6742,7 @@
               <a:defRPr/>
             </a:pPr>
             <a:r>
-              <a:rPr lang="en-GB" sz="2800" b="0" i="0" u="none" strike="noStrike" cap="none" spc="29">
+              <a:rPr lang="en-GB" sz="2800" b="0" i="0" u="none" strike="noStrike" cap="none" spc="28">
                 <a:solidFill>
                   <a:schemeClr val="tx1">
                     <a:lumMod val="85000"/>
@@ -6722,7 +6755,7 @@
               </a:rPr>
               <a:t>Great valuable input</a:t>
             </a:r>
-            <a:endParaRPr lang="en-GB" sz="2800" b="0" i="0" u="none" strike="noStrike" cap="none" spc="29">
+            <a:endParaRPr lang="en-GB" sz="2800" b="0" i="0" u="none" strike="noStrike" cap="none" spc="28">
               <a:solidFill>
                 <a:schemeClr val="tx1">
                   <a:lumMod val="85000"/>
@@ -6737,7 +6770,7 @@
             <a:pPr>
               <a:defRPr/>
             </a:pPr>
-            <a:endParaRPr lang="en-GB" sz="2800" b="0" i="0" u="none" strike="noStrike" cap="none" spc="29">
+            <a:endParaRPr lang="en-GB" sz="2800" b="0" i="0" u="none" strike="noStrike" cap="none" spc="28">
               <a:solidFill>
                 <a:schemeClr val="tx1">
                   <a:lumMod val="85000"/>
@@ -6758,7 +6791,7 @@
               <a:defRPr/>
             </a:pPr>
             <a:r>
-              <a:rPr lang="en-GB" sz="2800" b="0" i="0" u="none" strike="noStrike" cap="none" spc="29">
+              <a:rPr lang="en-GB" sz="2800" b="0" i="0" u="none" strike="noStrike" cap="none" spc="28">
                 <a:solidFill>
                   <a:schemeClr val="tx1">
                     <a:lumMod val="85000"/>
@@ -6771,7 +6804,7 @@
               </a:rPr>
               <a:t>Limitations:</a:t>
             </a:r>
-            <a:endParaRPr lang="en-GB" sz="2800" b="0" i="0" u="none" strike="noStrike" cap="none" spc="29">
+            <a:endParaRPr lang="en-GB" sz="2800" b="0" i="0" u="none" strike="noStrike" cap="none" spc="28">
               <a:solidFill>
                 <a:schemeClr val="tx1">
                   <a:lumMod val="85000"/>
@@ -6787,7 +6820,7 @@
               <a:defRPr/>
             </a:pPr>
             <a:r>
-              <a:rPr lang="en-GB" sz="2800" b="0" i="0" u="none" strike="noStrike" cap="none" spc="29">
+              <a:rPr lang="en-GB" sz="2800" b="0" i="0" u="none" strike="noStrike" cap="none" spc="28">
                 <a:solidFill>
                   <a:schemeClr val="tx1">
                     <a:lumMod val="85000"/>
@@ -6800,7 +6833,7 @@
               </a:rPr>
               <a:t>Communicating blockers</a:t>
             </a:r>
-            <a:endParaRPr lang="en-GB" sz="2800" b="0" i="0" u="none" strike="noStrike" cap="none" spc="29">
+            <a:endParaRPr lang="en-GB" sz="2800" b="0" i="0" u="none" strike="noStrike" cap="none" spc="28">
               <a:solidFill>
                 <a:schemeClr val="tx1">
                   <a:lumMod val="85000"/>
@@ -6817,7 +6850,7 @@
               <a:defRPr/>
             </a:pPr>
             <a:r>
-              <a:rPr lang="en-GB" sz="2800" b="0" i="0" u="none" strike="noStrike" cap="none" spc="29">
+              <a:rPr lang="en-GB" sz="2800" b="0" i="0" u="none" strike="noStrike" cap="none" spc="28">
                 <a:solidFill>
                   <a:schemeClr val="tx1">
                     <a:lumMod val="85000"/>
@@ -6830,7 +6863,7 @@
               </a:rPr>
               <a:t>Reliability</a:t>
             </a:r>
-            <a:endParaRPr lang="en-GB" sz="2800" b="0" i="0" u="none" strike="noStrike" cap="none" spc="29">
+            <a:endParaRPr lang="en-GB" sz="2800" b="0" i="0" u="none" strike="noStrike" cap="none" spc="28">
               <a:solidFill>
                 <a:schemeClr val="tx1">
                   <a:lumMod val="85000"/>
@@ -6846,7 +6879,7 @@
             <a:pPr>
               <a:defRPr/>
             </a:pPr>
-            <a:endParaRPr lang="en-GB" sz="2800" b="0" i="0" u="none" strike="noStrike" cap="none" spc="29">
+            <a:endParaRPr lang="en-GB" sz="2800" b="0" i="0" u="none" strike="noStrike" cap="none" spc="28">
               <a:solidFill>
                 <a:schemeClr val="tx1">
                   <a:lumMod val="85000"/>
@@ -6861,7 +6894,7 @@
             <a:pPr>
               <a:defRPr/>
             </a:pPr>
-            <a:endParaRPr lang="en-GB" sz="2800" b="0" i="0" u="none" strike="noStrike" cap="none" spc="29">
+            <a:endParaRPr lang="en-GB" sz="2800" b="0" i="0" u="none" strike="noStrike" cap="none" spc="28">
               <a:solidFill>
                 <a:schemeClr val="tx1">
                   <a:lumMod val="85000"/>
@@ -6909,7 +6942,7 @@
       </p:grpSpPr>
       <p:sp>
         <p:nvSpPr>
-          <p:cNvPr id="146197866" name="Title 1"/>
+          <p:cNvPr id="1981455006" name="Title 1"/>
           <p:cNvSpPr>
             <a:spLocks noGrp="1"/>
           </p:cNvSpPr>
@@ -6935,14 +6968,14 @@
       </p:sp>
       <p:sp>
         <p:nvSpPr>
-          <p:cNvPr id="338450370" name=""/>
+          <p:cNvPr id="899489944" name=""/>
           <p:cNvSpPr txBox="1"/>
           <p:nvPr/>
         </p:nvSpPr>
         <p:spPr bwMode="auto">
           <a:xfrm rot="0" flipH="0" flipV="0">
-            <a:off x="721046" y="1417674"/>
-            <a:ext cx="11063825" cy="6492599"/>
+            <a:off x="721045" y="1417673"/>
+            <a:ext cx="11064184" cy="6492599"/>
           </a:xfrm>
           <a:prstGeom prst="rect">
             <a:avLst/>
@@ -7018,6 +7051,15 @@
             </a:endParaRPr>
           </a:p>
           <a:p>
+            <a:pPr>
+              <a:defRPr/>
+            </a:pPr>
+            <a:endParaRPr sz="2800">
+              <a:latin typeface="Aptos"/>
+              <a:cs typeface="Aptos"/>
+            </a:endParaRPr>
+          </a:p>
+          <a:p>
             <a:pPr marL="394023" indent="-394023">
               <a:buFont typeface="Arial"/>
               <a:buChar char="–"/>
@@ -7117,9 +7159,7 @@
             </a:endParaRPr>
           </a:p>
           <a:p>
-            <a:pPr marL="394023" indent="-394023">
-              <a:buFont typeface="Arial"/>
-              <a:buChar char="–"/>
+            <a:pPr>
               <a:defRPr/>
             </a:pPr>
             <a:endParaRPr sz="2800">
@@ -7127,20 +7167,11 @@
               <a:cs typeface="Aptos"/>
             </a:endParaRPr>
           </a:p>
-          <a:p>
-            <a:pPr>
-              <a:defRPr/>
-            </a:pPr>
-            <a:endParaRPr sz="2800">
-              <a:latin typeface="Aptos"/>
-              <a:cs typeface="Aptos"/>
-            </a:endParaRPr>
-          </a:p>
         </p:txBody>
       </p:sp>
       <p:pic>
         <p:nvPicPr>
-          <p:cNvPr id="2076326540" name=""/>
+          <p:cNvPr id="1889761593" name=""/>
           <p:cNvPicPr>
             <a:picLocks noChangeAspect="1"/>
           </p:cNvPicPr>
@@ -7152,8 +7183,8 @@
         </p:blipFill>
         <p:spPr bwMode="auto">
           <a:xfrm flipH="0" flipV="0">
-            <a:off x="4641802" y="2334429"/>
-            <a:ext cx="7354491" cy="4296188"/>
+            <a:off x="4647686" y="2340577"/>
+            <a:ext cx="7398188" cy="4321713"/>
           </a:xfrm>
           <a:prstGeom prst="rect">
             <a:avLst/>
@@ -7195,7 +7226,7 @@
       </p:grpSpPr>
       <p:sp>
         <p:nvSpPr>
-          <p:cNvPr id="791077042" name="Title 1"/>
+          <p:cNvPr id="243218695" name="Title 1"/>
           <p:cNvSpPr>
             <a:spLocks noGrp="1"/>
           </p:cNvSpPr>
@@ -7221,7 +7252,7 @@
       </p:sp>
       <p:sp>
         <p:nvSpPr>
-          <p:cNvPr id="228155122" name=""/>
+          <p:cNvPr id="1847202549" name=""/>
           <p:cNvSpPr txBox="1"/>
           <p:nvPr/>
         </p:nvSpPr>
@@ -7479,7 +7510,7 @@
       </p:grpSpPr>
       <p:pic>
         <p:nvPicPr>
-          <p:cNvPr id="2001784322" name=""/>
+          <p:cNvPr id="2002338489" name=""/>
           <p:cNvPicPr>
             <a:picLocks noChangeAspect="1"/>
           </p:cNvPicPr>
